--- a/presentations/b15-day2-operations/B15_Day2_Operations_Narrated.pptx
+++ b/presentations/b15-day2-operations/B15_Day2_Operations_Narrated.pptx
@@ -185,7 +185,7 @@
     </p:spTree>
     <p:extLst>
       <p:ext uri="{BB962C8B-B14F-4D97-AF65-F5344CB8AC3E}">
-        <p14:creationId xmlns:p14="http://schemas.microsoft.com/office/powerpoint/2010/main" val="332133951"/>
+        <p14:creationId xmlns:p14="http://schemas.microsoft.com/office/powerpoint/2010/main" val="3843756696"/>
       </p:ext>
     </p:extLst>
   </p:cSld>
@@ -2424,7 +2424,7 @@
             <a:hlinkClick r:id="" action="ppaction://media"/>
             <a:extLst>
               <a:ext uri="{FF2B5EF4-FFF2-40B4-BE49-F238E27FC236}">
-                <a16:creationId xmlns:a16="http://schemas.microsoft.com/office/drawing/2014/main" id="{4CD692A6-F70F-624C-7E9D-839ED99496BA}"/>
+                <a16:creationId xmlns:a16="http://schemas.microsoft.com/office/drawing/2014/main" id="{162AC748-7167-2F6F-BD6B-E318142680A3}"/>
               </a:ext>
             </a:extLst>
           </p:cNvPr>
@@ -2440,7 +2440,7 @@
                     <p:ext uri="{3AFAAA56-56D3-431D-BCD4-E75A35582382}">
                       <p173:tracksInfo xmlns:p173="http://schemas.microsoft.com/office/powerpoint/2017/3/main" displayLoc="slide">
                         <p173:trackLst>
-                          <p173:track id="{3950B334-417C-4745-8601-830C77151632}" label="English (captions)" lang="en-US" r:embed="rId6"/>
+                          <p173:track id="{27AB21EF-811E-487F-B6E7-10CF4E8146BD}" label="English (captions)" lang="en-US" r:embed="rId6"/>
                         </p173:trackLst>
                       </p173:tracksInfo>
                     </p:ext>
@@ -2458,7 +2458,7 @@
         </p:blipFill>
         <p:spPr>
           <a:xfrm>
-            <a:off x="127000" y="6350000"/>
+            <a:off x="12446000" y="127000"/>
             <a:ext cx="304800" cy="304800"/>
           </a:xfrm>
           <a:prstGeom prst="rect">
@@ -4460,7 +4460,7 @@
             <a:hlinkClick r:id="" action="ppaction://media"/>
             <a:extLst>
               <a:ext uri="{FF2B5EF4-FFF2-40B4-BE49-F238E27FC236}">
-                <a16:creationId xmlns:a16="http://schemas.microsoft.com/office/drawing/2014/main" id="{6E4B33C9-9B54-E397-4EBA-0ACC1108D97C}"/>
+                <a16:creationId xmlns:a16="http://schemas.microsoft.com/office/drawing/2014/main" id="{47EAF110-8C65-A52C-0C86-44D2F57CAA35}"/>
               </a:ext>
             </a:extLst>
           </p:cNvPr>
@@ -4476,7 +4476,7 @@
                     <p:ext uri="{3AFAAA56-56D3-431D-BCD4-E75A35582382}">
                       <p173:tracksInfo xmlns:p173="http://schemas.microsoft.com/office/powerpoint/2017/3/main" displayLoc="slide">
                         <p173:trackLst>
-                          <p173:track id="{842A2430-3B83-44FF-8707-14EF4495342A}" label="English (captions)" lang="en-US" r:embed="rId8"/>
+                          <p173:track id="{9EB921E0-1C6C-492B-A6B4-CEF2FF257921}" label="English (captions)" lang="en-US" r:embed="rId8"/>
                         </p173:trackLst>
                       </p173:tracksInfo>
                     </p:ext>
@@ -4494,7 +4494,7 @@
         </p:blipFill>
         <p:spPr>
           <a:xfrm>
-            <a:off x="127000" y="6350000"/>
+            <a:off x="12446000" y="127000"/>
             <a:ext cx="304800" cy="304800"/>
           </a:xfrm>
           <a:prstGeom prst="rect">
@@ -5882,7 +5882,7 @@
             <a:hlinkClick r:id="" action="ppaction://media"/>
             <a:extLst>
               <a:ext uri="{FF2B5EF4-FFF2-40B4-BE49-F238E27FC236}">
-                <a16:creationId xmlns:a16="http://schemas.microsoft.com/office/drawing/2014/main" id="{E42B1890-B2AC-B540-07FB-5485F417C464}"/>
+                <a16:creationId xmlns:a16="http://schemas.microsoft.com/office/drawing/2014/main" id="{A0670C2D-016A-9CF4-B46E-FF936F7EC250}"/>
               </a:ext>
             </a:extLst>
           </p:cNvPr>
@@ -5898,7 +5898,7 @@
                     <p:ext uri="{3AFAAA56-56D3-431D-BCD4-E75A35582382}">
                       <p173:tracksInfo xmlns:p173="http://schemas.microsoft.com/office/powerpoint/2017/3/main" displayLoc="slide">
                         <p173:trackLst>
-                          <p173:track id="{883E6FC4-1C5D-4157-86DF-BA5EB9DF3105}" label="English (captions)" lang="en-US" r:embed="rId9"/>
+                          <p173:track id="{9A2F74D1-104C-4D17-A7D7-59572BBAE059}" label="English (captions)" lang="en-US" r:embed="rId9"/>
                         </p173:trackLst>
                       </p173:tracksInfo>
                     </p:ext>
@@ -5916,7 +5916,7 @@
         </p:blipFill>
         <p:spPr>
           <a:xfrm>
-            <a:off x="127000" y="6350000"/>
+            <a:off x="12446000" y="127000"/>
             <a:ext cx="304800" cy="304800"/>
           </a:xfrm>
           <a:prstGeom prst="rect">
@@ -7229,7 +7229,7 @@
             <a:hlinkClick r:id="" action="ppaction://media"/>
             <a:extLst>
               <a:ext uri="{FF2B5EF4-FFF2-40B4-BE49-F238E27FC236}">
-                <a16:creationId xmlns:a16="http://schemas.microsoft.com/office/drawing/2014/main" id="{44833647-DA5A-3B36-1BCD-8B8BB7986E30}"/>
+                <a16:creationId xmlns:a16="http://schemas.microsoft.com/office/drawing/2014/main" id="{885FFF92-78E7-DB2F-80CA-4F32D5936AE9}"/>
               </a:ext>
             </a:extLst>
           </p:cNvPr>
@@ -7245,7 +7245,7 @@
                     <p:ext uri="{3AFAAA56-56D3-431D-BCD4-E75A35582382}">
                       <p173:tracksInfo xmlns:p173="http://schemas.microsoft.com/office/powerpoint/2017/3/main" displayLoc="slide">
                         <p173:trackLst>
-                          <p173:track id="{BBC3648F-0EAC-4E3C-B9E2-D7274D89E470}" label="English (captions)" lang="en-US" r:embed="rId9"/>
+                          <p173:track id="{E5A4F9A3-188E-4F16-881E-253F76E1D85D}" label="English (captions)" lang="en-US" r:embed="rId9"/>
                         </p173:trackLst>
                       </p173:tracksInfo>
                     </p:ext>
@@ -7263,7 +7263,7 @@
         </p:blipFill>
         <p:spPr>
           <a:xfrm>
-            <a:off x="127000" y="6350000"/>
+            <a:off x="12446000" y="127000"/>
             <a:ext cx="304800" cy="304800"/>
           </a:xfrm>
           <a:prstGeom prst="rect">
@@ -8332,7 +8332,7 @@
             <a:hlinkClick r:id="" action="ppaction://media"/>
             <a:extLst>
               <a:ext uri="{FF2B5EF4-FFF2-40B4-BE49-F238E27FC236}">
-                <a16:creationId xmlns:a16="http://schemas.microsoft.com/office/drawing/2014/main" id="{95557735-5558-B8CC-3F2F-B469606DE3E6}"/>
+                <a16:creationId xmlns:a16="http://schemas.microsoft.com/office/drawing/2014/main" id="{8431D132-77DC-5912-91F5-6D12F104C466}"/>
               </a:ext>
             </a:extLst>
           </p:cNvPr>
@@ -8348,7 +8348,7 @@
                     <p:ext uri="{3AFAAA56-56D3-431D-BCD4-E75A35582382}">
                       <p173:tracksInfo xmlns:p173="http://schemas.microsoft.com/office/powerpoint/2017/3/main" displayLoc="slide">
                         <p173:trackLst>
-                          <p173:track id="{5AA0D82D-2F59-41EF-8AFC-91E2750D654B}" label="English (captions)" lang="en-US" r:embed="rId11"/>
+                          <p173:track id="{36C6FBDC-1F29-4B09-8037-035A4DF8354B}" label="English (captions)" lang="en-US" r:embed="rId11"/>
                         </p173:trackLst>
                       </p173:tracksInfo>
                     </p:ext>
@@ -8366,7 +8366,7 @@
         </p:blipFill>
         <p:spPr>
           <a:xfrm>
-            <a:off x="127000" y="6350000"/>
+            <a:off x="12446000" y="127000"/>
             <a:ext cx="304800" cy="304800"/>
           </a:xfrm>
           <a:prstGeom prst="rect">
@@ -9315,7 +9315,7 @@
             <a:hlinkClick r:id="" action="ppaction://media"/>
             <a:extLst>
               <a:ext uri="{FF2B5EF4-FFF2-40B4-BE49-F238E27FC236}">
-                <a16:creationId xmlns:a16="http://schemas.microsoft.com/office/drawing/2014/main" id="{D173D8D8-C173-5570-1E45-B126928B8494}"/>
+                <a16:creationId xmlns:a16="http://schemas.microsoft.com/office/drawing/2014/main" id="{14ABED36-8839-61D4-A021-EC0519F3F15D}"/>
               </a:ext>
             </a:extLst>
           </p:cNvPr>
@@ -9331,7 +9331,7 @@
                     <p:ext uri="{3AFAAA56-56D3-431D-BCD4-E75A35582382}">
                       <p173:tracksInfo xmlns:p173="http://schemas.microsoft.com/office/powerpoint/2017/3/main" displayLoc="slide">
                         <p173:trackLst>
-                          <p173:track id="{7423D929-7D4B-47C8-8F7B-0E4CD56BF7DB}" label="English (captions)" lang="en-US" r:embed="rId9"/>
+                          <p173:track id="{116E2369-19A0-4D70-9312-3F7B9781F0E9}" label="English (captions)" lang="en-US" r:embed="rId9"/>
                         </p173:trackLst>
                       </p173:tracksInfo>
                     </p:ext>
@@ -9349,7 +9349,7 @@
         </p:blipFill>
         <p:spPr>
           <a:xfrm>
-            <a:off x="127000" y="6350000"/>
+            <a:off x="12446000" y="127000"/>
             <a:ext cx="304800" cy="304800"/>
           </a:xfrm>
           <a:prstGeom prst="rect">
@@ -10450,7 +10450,7 @@
             <a:hlinkClick r:id="" action="ppaction://media"/>
             <a:extLst>
               <a:ext uri="{FF2B5EF4-FFF2-40B4-BE49-F238E27FC236}">
-                <a16:creationId xmlns:a16="http://schemas.microsoft.com/office/drawing/2014/main" id="{F82B223B-029E-08F3-0023-84D2C8AE81C1}"/>
+                <a16:creationId xmlns:a16="http://schemas.microsoft.com/office/drawing/2014/main" id="{CED6C992-DB88-5D7A-366B-CFAE3630DDFA}"/>
               </a:ext>
             </a:extLst>
           </p:cNvPr>
@@ -10466,7 +10466,7 @@
                     <p:ext uri="{3AFAAA56-56D3-431D-BCD4-E75A35582382}">
                       <p173:tracksInfo xmlns:p173="http://schemas.microsoft.com/office/powerpoint/2017/3/main" displayLoc="slide">
                         <p173:trackLst>
-                          <p173:track id="{859933A8-33B7-4899-ABAD-AC8A1C6FEA66}" label="English (captions)" lang="en-US" r:embed="rId10"/>
+                          <p173:track id="{088541CF-2576-4573-9081-DCA983111833}" label="English (captions)" lang="en-US" r:embed="rId10"/>
                         </p173:trackLst>
                       </p173:tracksInfo>
                     </p:ext>
@@ -10484,7 +10484,7 @@
         </p:blipFill>
         <p:spPr>
           <a:xfrm>
-            <a:off x="127000" y="6350000"/>
+            <a:off x="12446000" y="127000"/>
             <a:ext cx="304800" cy="304800"/>
           </a:xfrm>
           <a:prstGeom prst="rect">
@@ -12232,7 +12232,7 @@
             <a:hlinkClick r:id="" action="ppaction://media"/>
             <a:extLst>
               <a:ext uri="{FF2B5EF4-FFF2-40B4-BE49-F238E27FC236}">
-                <a16:creationId xmlns:a16="http://schemas.microsoft.com/office/drawing/2014/main" id="{3C6CB59E-16B0-C85B-8C7E-508D1D559636}"/>
+                <a16:creationId xmlns:a16="http://schemas.microsoft.com/office/drawing/2014/main" id="{406433DE-F2F3-BC45-5B25-1C8DE05D8165}"/>
               </a:ext>
             </a:extLst>
           </p:cNvPr>
@@ -12248,7 +12248,7 @@
                     <p:ext uri="{3AFAAA56-56D3-431D-BCD4-E75A35582382}">
                       <p173:tracksInfo xmlns:p173="http://schemas.microsoft.com/office/powerpoint/2017/3/main" displayLoc="slide">
                         <p173:trackLst>
-                          <p173:track id="{D9CCC662-EB90-4A50-8520-77593A761174}" label="English (captions)" lang="en-US" r:embed="rId8"/>
+                          <p173:track id="{B4D6AAFA-12B2-4FEC-A2D3-E830A0C41E00}" label="English (captions)" lang="en-US" r:embed="rId8"/>
                         </p173:trackLst>
                       </p173:tracksInfo>
                     </p:ext>
@@ -12266,7 +12266,7 @@
         </p:blipFill>
         <p:spPr>
           <a:xfrm>
-            <a:off x="127000" y="6350000"/>
+            <a:off x="12446000" y="127000"/>
             <a:ext cx="304800" cy="304800"/>
           </a:xfrm>
           <a:prstGeom prst="rect">
@@ -13686,7 +13686,7 @@
             <a:hlinkClick r:id="" action="ppaction://media"/>
             <a:extLst>
               <a:ext uri="{FF2B5EF4-FFF2-40B4-BE49-F238E27FC236}">
-                <a16:creationId xmlns:a16="http://schemas.microsoft.com/office/drawing/2014/main" id="{8B088962-FA51-0884-C2EE-5EA087CDF77F}"/>
+                <a16:creationId xmlns:a16="http://schemas.microsoft.com/office/drawing/2014/main" id="{8F5D92EA-EE00-0C12-5A5C-3C3306926144}"/>
               </a:ext>
             </a:extLst>
           </p:cNvPr>
@@ -13702,7 +13702,7 @@
                     <p:ext uri="{3AFAAA56-56D3-431D-BCD4-E75A35582382}">
                       <p173:tracksInfo xmlns:p173="http://schemas.microsoft.com/office/powerpoint/2017/3/main" displayLoc="slide">
                         <p173:trackLst>
-                          <p173:track id="{F1173D95-7CEA-4F0B-AEB9-F6DAE3163F81}" label="English (captions)" lang="en-US" r:embed="rId9"/>
+                          <p173:track id="{2F7565BB-8909-408F-AFAA-03D09526541E}" label="English (captions)" lang="en-US" r:embed="rId9"/>
                         </p173:trackLst>
                       </p173:tracksInfo>
                     </p:ext>
@@ -13720,7 +13720,7 @@
         </p:blipFill>
         <p:spPr>
           <a:xfrm>
-            <a:off x="127000" y="6350000"/>
+            <a:off x="12446000" y="127000"/>
             <a:ext cx="304800" cy="304800"/>
           </a:xfrm>
           <a:prstGeom prst="rect">
@@ -14961,7 +14961,7 @@
             <a:hlinkClick r:id="" action="ppaction://media"/>
             <a:extLst>
               <a:ext uri="{FF2B5EF4-FFF2-40B4-BE49-F238E27FC236}">
-                <a16:creationId xmlns:a16="http://schemas.microsoft.com/office/drawing/2014/main" id="{89405086-821D-CEE6-BCF1-FB306233B78C}"/>
+                <a16:creationId xmlns:a16="http://schemas.microsoft.com/office/drawing/2014/main" id="{0B95A2CF-F5A0-9E48-BC54-94420BC0E748}"/>
               </a:ext>
             </a:extLst>
           </p:cNvPr>
@@ -14977,7 +14977,7 @@
                     <p:ext uri="{3AFAAA56-56D3-431D-BCD4-E75A35582382}">
                       <p173:tracksInfo xmlns:p173="http://schemas.microsoft.com/office/powerpoint/2017/3/main" displayLoc="slide">
                         <p173:trackLst>
-                          <p173:track id="{5F7B5CBB-EA66-4637-A292-E5704F31045C}" label="English (captions)" lang="en-US" r:embed="rId8"/>
+                          <p173:track id="{43E3DE83-5DAE-42F0-8181-B761BFD8947E}" label="English (captions)" lang="en-US" r:embed="rId8"/>
                         </p173:trackLst>
                       </p173:tracksInfo>
                     </p:ext>
@@ -14995,7 +14995,7 @@
         </p:blipFill>
         <p:spPr>
           <a:xfrm>
-            <a:off x="127000" y="6350000"/>
+            <a:off x="12446000" y="127000"/>
             <a:ext cx="304800" cy="304800"/>
           </a:xfrm>
           <a:prstGeom prst="rect">
@@ -15944,7 +15944,7 @@
             <a:hlinkClick r:id="" action="ppaction://media"/>
             <a:extLst>
               <a:ext uri="{FF2B5EF4-FFF2-40B4-BE49-F238E27FC236}">
-                <a16:creationId xmlns:a16="http://schemas.microsoft.com/office/drawing/2014/main" id="{AE7B3ECF-2900-1580-9C9D-A989A43AB87E}"/>
+                <a16:creationId xmlns:a16="http://schemas.microsoft.com/office/drawing/2014/main" id="{965F2E0E-9B9B-A841-3EC9-D1C3671699C8}"/>
               </a:ext>
             </a:extLst>
           </p:cNvPr>
@@ -15960,7 +15960,7 @@
                     <p:ext uri="{3AFAAA56-56D3-431D-BCD4-E75A35582382}">
                       <p173:tracksInfo xmlns:p173="http://schemas.microsoft.com/office/powerpoint/2017/3/main" displayLoc="slide">
                         <p173:trackLst>
-                          <p173:track id="{FE5D618F-521B-4E47-8314-9E30D19B2D6A}" label="English (captions)" lang="en-US" r:embed="rId9"/>
+                          <p173:track id="{F4F291A4-849D-4ACC-AC26-E38B7F3C4B45}" label="English (captions)" lang="en-US" r:embed="rId9"/>
                         </p173:trackLst>
                       </p173:tracksInfo>
                     </p:ext>
@@ -15978,7 +15978,7 @@
         </p:blipFill>
         <p:spPr>
           <a:xfrm>
-            <a:off x="127000" y="6350000"/>
+            <a:off x="12446000" y="127000"/>
             <a:ext cx="304800" cy="304800"/>
           </a:xfrm>
           <a:prstGeom prst="rect">
@@ -17291,7 +17291,7 @@
             <a:hlinkClick r:id="" action="ppaction://media"/>
             <a:extLst>
               <a:ext uri="{FF2B5EF4-FFF2-40B4-BE49-F238E27FC236}">
-                <a16:creationId xmlns:a16="http://schemas.microsoft.com/office/drawing/2014/main" id="{029B34D0-152C-84AF-E414-61163773211B}"/>
+                <a16:creationId xmlns:a16="http://schemas.microsoft.com/office/drawing/2014/main" id="{579F2033-108D-51AB-2474-2A2DFBF76005}"/>
               </a:ext>
             </a:extLst>
           </p:cNvPr>
@@ -17307,7 +17307,7 @@
                     <p:ext uri="{3AFAAA56-56D3-431D-BCD4-E75A35582382}">
                       <p173:tracksInfo xmlns:p173="http://schemas.microsoft.com/office/powerpoint/2017/3/main" displayLoc="slide">
                         <p173:trackLst>
-                          <p173:track id="{76CE85CE-F96A-4C7C-B7E6-5BA88642E7C6}" label="English (captions)" lang="en-US" r:embed="rId9"/>
+                          <p173:track id="{E18CDA34-0F59-434C-8A1F-7DEDEB3A9B64}" label="English (captions)" lang="en-US" r:embed="rId9"/>
                         </p173:trackLst>
                       </p173:tracksInfo>
                     </p:ext>
@@ -17325,7 +17325,7 @@
         </p:blipFill>
         <p:spPr>
           <a:xfrm>
-            <a:off x="127000" y="6350000"/>
+            <a:off x="12446000" y="127000"/>
             <a:ext cx="304800" cy="304800"/>
           </a:xfrm>
           <a:prstGeom prst="rect">
@@ -19134,7 +19134,7 @@
             <a:hlinkClick r:id="" action="ppaction://media"/>
             <a:extLst>
               <a:ext uri="{FF2B5EF4-FFF2-40B4-BE49-F238E27FC236}">
-                <a16:creationId xmlns:a16="http://schemas.microsoft.com/office/drawing/2014/main" id="{F04AC474-2D15-A958-890E-DCC1265439FA}"/>
+                <a16:creationId xmlns:a16="http://schemas.microsoft.com/office/drawing/2014/main" id="{1108A326-CD7E-AE67-3CA1-4561B70F5BE9}"/>
               </a:ext>
             </a:extLst>
           </p:cNvPr>
@@ -19150,7 +19150,7 @@
                     <p:ext uri="{3AFAAA56-56D3-431D-BCD4-E75A35582382}">
                       <p173:tracksInfo xmlns:p173="http://schemas.microsoft.com/office/powerpoint/2017/3/main" displayLoc="slide">
                         <p173:trackLst>
-                          <p173:track id="{AD3014E7-0DE0-49C5-81FF-6CB8405E61A3}" label="English (captions)" lang="en-US" r:embed="rId8"/>
+                          <p173:track id="{125C8EBB-6196-435B-A036-BFF3F8E3E637}" label="English (captions)" lang="en-US" r:embed="rId8"/>
                         </p173:trackLst>
                       </p173:tracksInfo>
                     </p:ext>
@@ -19168,7 +19168,7 @@
         </p:blipFill>
         <p:spPr>
           <a:xfrm>
-            <a:off x="127000" y="6350000"/>
+            <a:off x="12446000" y="127000"/>
             <a:ext cx="304800" cy="304800"/>
           </a:xfrm>
           <a:prstGeom prst="rect">

--- a/presentations/b15-day2-operations/B15_Day2_Operations_Narrated.pptx
+++ b/presentations/b15-day2-operations/B15_Day2_Operations_Narrated.pptx
@@ -119,7 +119,7 @@
   <p:extLst>
     <p:ext uri="{521415D9-36F7-43E2-AB2F-B90AF26B5E84}">
       <p14:sectionLst xmlns:p14="http://schemas.microsoft.com/office/powerpoint/2010/main">
-        <p14:section name="Why day two decides" id="{D0FF353E-A869-7C12-A695-DA3EBBB190FE}">
+        <p14:section name="Why day two decides" id="{CE7D2F3F-EC5E-9405-A590-8238C0C662CC}">
           <p14:sldIdLst>
             <p14:sldId id="256"/>
             <p14:sldId id="257"/>
@@ -127,7 +127,7 @@
             <p14:sldId id="259"/>
           </p14:sldIdLst>
         </p14:section>
-        <p14:section name="What day two runs on" id="{0132B807-FA08-771F-F92A-DABCE905311D}">
+        <p14:section name="What day two runs on" id="{2D4BF2E8-5F32-67ED-E690-F7D1CEDED929}">
           <p14:sldIdLst>
             <p14:sldId id="260"/>
             <p14:sldId id="261"/>
@@ -137,18 +137,18 @@
             <p14:sldId id="265"/>
           </p14:sldIdLst>
         </p14:section>
-        <p14:section name="Who runs day two" id="{754287B0-C07A-5D0A-4FF0-469533BA60B1}">
+        <p14:section name="Who runs day two" id="{673290A1-DDEB-2A8A-E95B-EBC6EBDC5856}">
           <p14:sldIdLst>
             <p14:sldId id="266"/>
           </p14:sldIdLst>
         </p14:section>
-        <p14:section name="How to run it and prove it" id="{571725BE-1AD4-1436-9E9D-376AC8C38DCD}">
+        <p14:section name="How to run it and prove it" id="{A481FD96-FF7D-7C2C-445B-F1EB39274A96}">
           <p14:sldIdLst>
             <p14:sldId id="267"/>
             <p14:sldId id="268"/>
           </p14:sldIdLst>
         </p14:section>
-        <p14:section name="Backup" id="{4F099D57-6CDA-75C5-034A-FD158DF1DF96}">
+        <p14:section name="Backup" id="{115017D2-FAF5-5F8A-A05E-72D1A821D30D}">
           <p14:sldIdLst/>
         </p14:section>
       </p14:sectionLst>
@@ -185,7 +185,7 @@
     </p:spTree>
     <p:extLst>
       <p:ext uri="{BB962C8B-B14F-4D97-AF65-F5344CB8AC3E}">
-        <p14:creationId xmlns:p14="http://schemas.microsoft.com/office/powerpoint/2010/main" val="3843756696"/>
+        <p14:creationId xmlns:p14="http://schemas.microsoft.com/office/powerpoint/2010/main" val="2406833710"/>
       </p:ext>
     </p:extLst>
   </p:cSld>
@@ -421,7 +421,7 @@
           <a:p>
             <a:r>
               <a:rPr lang="en-US" dirty="0"/>
-              <a:t>[10:14–11:25]  Before anyone builds a compliance application, know what the platform already does. ServiceNow's Policy and Compliance Management schedules control tests and turns gaps into issues. Continuous Authorization and Monitoring walks the seven steps of the Risk Management Framework, gives one view of every plan of action, and in recent releases imports and exports security plans, plans of action and assessment results in OSCAL. Configuration Compliance imports Defender for Cloud results and matches them to configuration items. The government offering is listed as FedRAMP Certified at Class D, High.
+              <a:t>[10:24–11:34]  Before anyone builds a compliance application, know what the platform already does. ServiceNow's Policy and Compliance Management schedules control tests and turns gaps into issues. Continuous Authorization and Monitoring walks the seven steps of the Risk Management Framework, gives one view of every plan of action, and in recent releases imports and exports security plans, plans of action and assessment results in OSCAL. Configuration Compliance imports Defender for Cloud results and matches them to configuration items. The government offering is listed as FedRAMP Certified at Class D, High.
 So the recommendation is to buy the native applications first and build only what they don't do: join every finding to the authoritative asset identity, close only with proof and flag human-only closures, and check the platform's control set against the control map.
 A control is proven by system evidence wherever a system can see it; people attest only to what no system can observe. And FedRAMP's indicators bind providers; for the agency they're vocabulary, not a deliverable.
 Workbook: Book 15, Chapter 11 — Attestation, Evidence and the Compliance Application (System evidence first; A correction about FedRAMP's indicators; The platform is the workflow record; What ServiceNow already provides; Build, buy or both); Chapter 02 (What the platform already ships); Chapter 03 (Prefer the connector); Chapter 07; Chapter 08 (Where ServiceNow's own products overlap).</a:t>
@@ -511,7 +511,7 @@
           <a:p>
             <a:r>
               <a:rPr lang="en-US" dirty="0"/>
-              <a:t>[11:25–12:41]  Day two is run by the people who touch the estate most often and decide the least, so every decision sits with someone who isn't holding the keyboard, and every artifact has one owner and a review date.
+              <a:t>[11:34–12:50]  Day two is run by the people who touch the estate most often and decide the least, so every decision sits with someone who isn't holding the keyboard, and every artifact has one owner and a review date.
 The service desk has three lines. The first takes every request, classifies it, verifies the person and executes against an approved ticket. Cloud services is the escalation tier, not a second queue. Technicians approve nothing. The supervisor approves routine credential work for ordinary users, never a ticket they execute.
 Platform owners own the runbooks and what each catalog item does. The control owner, the CISO or the identity governance officer, owns the approval gate. The service management team builds both and decides neither: changing an approval rule is a normal change the change advisory board authorizes. The configuration database owner keeps the model, not the facts. The board has security and privacy members and authorizes changes, but doesn't accept risk; that goes to the CISO or the authorizing official. A contracted desk fits, because contractors prepare and execute while government officials decide.
 Workbook: Book 15, Chapter 10 — Who Runs Day Two (Where the roles come from; The service desk lines; The ITSM platform team; The CMDB owner; The change advisory board; The authorizing official; The responsibility matrix; Keeping the roles apart).</a:t>
@@ -601,7 +601,7 @@
           <a:p>
             <a:r>
               <a:rPr lang="en-US" dirty="0"/>
-              <a:t>[12:41–13:53]  The runbook turns all of this into a cadence, and each step says what it proves. Daily, a read-only synchronization probe replaces the morning interactive logon to the sync servers, and each error becomes a task; a completeness check confirms every log source is still sending; catalog tasks close with proof. Weekly, detection rules are tested against replayed known-bad events, and every task closed without automated proof is either evidenced or reopened. Monthly, results and the plan of action are regenerated, and the I S S O reviews the harness results. Quarterly, privileged access and trends are reviewed.
+              <a:t>[12:50–14:03]  The runbook turns all of this into a cadence, and each step says what it proves. Daily, a read-only synchronization probe replaces the morning interactive logon to the sync servers, and each error becomes a task; a completeness check confirms every log source is still sending; catalog tasks close with proof. Weekly, detection rules are tested against replayed known-bad events, and every task closed without automated proof is either evidenced or reopened. Monthly, results and the plan of action are regenerated, and the I S S O reviews the harness results. Quarterly, privileged access and trends are reviewed.
 The runbook also rewrites eight everyday tasks. A password reset is delivered on a channel separate from the request. A requester's script is never pasted and run: parameters travel, commands don't.
 The harnesses check the automation itself. A source past its freshness limit raises a high-severity alert. A deployment that doesn't close its control fails the pipeline. And a harness that stops running looks like one that passes, so check that each one ran.
 Workbook: Book 15, Chapter 12 — The Day-Two Operator Runbook and Validation (The runbook at a glance; Daily: the eight everyday tasks, governed; Weekly, monthly and quarterly; Validation and test harnesses; What the harnesses can't prove).</a:t>
@@ -691,7 +691,7 @@
           <a:p>
             <a:r>
               <a:rPr lang="en-US" dirty="0"/>
-              <a:t>[13:53–15:01]  So, four decisions.
+              <a:t>[14:03–15:10]  So, four decisions.
 Put the identity-verification procedure under the CISO, and treat every authenticator reset as an account transfer: the most friction on the most sensitive accounts, and an alert on every reset.
 Build one front door. Redirect the team mailbox, triage by authority, and let unanswered approvals expire to reject.
 Buy the platform's native compliance applications first, and build only what they lack. Record an authorization verdict before any SaaS integration is configured, and check every feature in your own cloud.
@@ -1414,8 +1414,8 @@
           <a:p>
             <a:r>
               <a:rPr lang="en-US" dirty="0"/>
-              <a:t>[9:01–10:14]  Microsoft, AWS and VMware already ship tools that test most of the settings an assessor asks about. The gap is turning each failed test into owned work with a clock, and each closed task into a record. The program runs one loop everywhere: the native tool tests, drift is detected, a typed task is raised against the configuration item, the owning team fixes it natively, and the task closes on a re-test, not a click. The service management platform reads control state; it never writes it.
-The government clouds differ. Defender for Cloud's ServiceNow integration isn't available in Azure Government. Compliance Manager's continuous assessments are still rolling out in GCC. AWS Audit Manager closed to new customers on April 30, 2026, and has no GovCloud endpoint. AWS's ServiceNow connector loses support on March 31, 2027, and Security Hub keeps findings only ninety days. In VMware Cloud Foundation 9.1, the compliance benchmarks were replaced by a posture tool that lists no NIST or DISA benchmark. On premises, the agency produces every piece of evidence itself.
+              <a:t>[9:01–10:24]  Microsoft, AWS and VMware already ship tools that test most of the settings an assessor asks about. The gap is turning each failed test into owned work with a clock, and each closed task into a record. The program runs one loop everywhere: the native tool tests, drift is detected, a typed task is raised against the configuration item, the owning team fixes it natively, and the task closes on a re-test, not a click. The service management platform reads control state; it never writes it.
+The government clouds differ. Defender for Cloud's ServiceNow integration isn't available in Azure Government. Compliance Manager's continuous assessments are still rolling out in GCC. AWS Audit Manager closed to new customers on April 30, 2026, and has no GovCloud endpoint. AWS's ServiceNow connector loses support on March 31, 2027, and Security Hub keeps findings only ninety days. In VMware Cloud Foundation 9.1, the compliance benchmarks were replaced by a posture tool built on Broadcom's own hardening guide, with no NIST 800-53 benchmark, so the agency maps that guide, and CIS ESXi where it uses it, to its own CM-6 settings. On premises, the agency produces every piece of evidence itself.
 Workbook: Book 15, Chapter 08 — Control Compliance Automation: Microsoft 365 and Azure (One loop on every surface; Purview Compliance Manager; Three routes to the ITSM platform); Chapter 09 — Control Compliance Automation: AWS and VMware (AWS Audit Manager; Getting AWS results into the ITSM platform; VMware: the on-premises evidence gap).</a:t>
             </a:r>
           </a:p>
@@ -2424,7 +2424,7 @@
             <a:hlinkClick r:id="" action="ppaction://media"/>
             <a:extLst>
               <a:ext uri="{FF2B5EF4-FFF2-40B4-BE49-F238E27FC236}">
-                <a16:creationId xmlns:a16="http://schemas.microsoft.com/office/drawing/2014/main" id="{162AC748-7167-2F6F-BD6B-E318142680A3}"/>
+                <a16:creationId xmlns:a16="http://schemas.microsoft.com/office/drawing/2014/main" id="{529BB473-0026-8C58-2796-7CA0EA9DC1AB}"/>
               </a:ext>
             </a:extLst>
           </p:cNvPr>
@@ -2440,7 +2440,7 @@
                     <p:ext uri="{3AFAAA56-56D3-431D-BCD4-E75A35582382}">
                       <p173:tracksInfo xmlns:p173="http://schemas.microsoft.com/office/powerpoint/2017/3/main" displayLoc="slide">
                         <p173:trackLst>
-                          <p173:track id="{27AB21EF-811E-487F-B6E7-10CF4E8146BD}" label="English (captions)" lang="en-US" r:embed="rId6"/>
+                          <p173:track id="{480DA174-619A-4EED-AAAE-882FA04FF6BC}" label="English (captions)" lang="en-US" r:embed="rId6"/>
                         </p173:trackLst>
                       </p173:tracksInfo>
                     </p:ext>
@@ -4460,7 +4460,7 @@
             <a:hlinkClick r:id="" action="ppaction://media"/>
             <a:extLst>
               <a:ext uri="{FF2B5EF4-FFF2-40B4-BE49-F238E27FC236}">
-                <a16:creationId xmlns:a16="http://schemas.microsoft.com/office/drawing/2014/main" id="{47EAF110-8C65-A52C-0C86-44D2F57CAA35}"/>
+                <a16:creationId xmlns:a16="http://schemas.microsoft.com/office/drawing/2014/main" id="{0F66F715-4C24-2522-3465-4B3A14F4E3B0}"/>
               </a:ext>
             </a:extLst>
           </p:cNvPr>
@@ -4476,7 +4476,7 @@
                     <p:ext uri="{3AFAAA56-56D3-431D-BCD4-E75A35582382}">
                       <p173:tracksInfo xmlns:p173="http://schemas.microsoft.com/office/powerpoint/2017/3/main" displayLoc="slide">
                         <p173:trackLst>
-                          <p173:track id="{9EB921E0-1C6C-492B-A6B4-CEF2FF257921}" label="English (captions)" lang="en-US" r:embed="rId8"/>
+                          <p173:track id="{8B55A7C0-99F3-4D0C-A166-AB018A2BBEE5}" label="English (captions)" lang="en-US" r:embed="rId8"/>
                         </p173:trackLst>
                       </p173:tracksInfo>
                     </p:ext>
@@ -5882,7 +5882,7 @@
             <a:hlinkClick r:id="" action="ppaction://media"/>
             <a:extLst>
               <a:ext uri="{FF2B5EF4-FFF2-40B4-BE49-F238E27FC236}">
-                <a16:creationId xmlns:a16="http://schemas.microsoft.com/office/drawing/2014/main" id="{A0670C2D-016A-9CF4-B46E-FF936F7EC250}"/>
+                <a16:creationId xmlns:a16="http://schemas.microsoft.com/office/drawing/2014/main" id="{76206388-D388-4918-A314-54472685464E}"/>
               </a:ext>
             </a:extLst>
           </p:cNvPr>
@@ -5898,7 +5898,7 @@
                     <p:ext uri="{3AFAAA56-56D3-431D-BCD4-E75A35582382}">
                       <p173:tracksInfo xmlns:p173="http://schemas.microsoft.com/office/powerpoint/2017/3/main" displayLoc="slide">
                         <p173:trackLst>
-                          <p173:track id="{9A2F74D1-104C-4D17-A7D7-59572BBAE059}" label="English (captions)" lang="en-US" r:embed="rId9"/>
+                          <p173:track id="{8F6A091A-FE7E-48CB-87F3-835C85E1A852}" label="English (captions)" lang="en-US" r:embed="rId9"/>
                         </p173:trackLst>
                       </p173:tracksInfo>
                     </p:ext>
@@ -7229,7 +7229,7 @@
             <a:hlinkClick r:id="" action="ppaction://media"/>
             <a:extLst>
               <a:ext uri="{FF2B5EF4-FFF2-40B4-BE49-F238E27FC236}">
-                <a16:creationId xmlns:a16="http://schemas.microsoft.com/office/drawing/2014/main" id="{885FFF92-78E7-DB2F-80CA-4F32D5936AE9}"/>
+                <a16:creationId xmlns:a16="http://schemas.microsoft.com/office/drawing/2014/main" id="{3AAACC95-7D20-5CA1-99CF-5FFE90D0FC5F}"/>
               </a:ext>
             </a:extLst>
           </p:cNvPr>
@@ -7245,7 +7245,7 @@
                     <p:ext uri="{3AFAAA56-56D3-431D-BCD4-E75A35582382}">
                       <p173:tracksInfo xmlns:p173="http://schemas.microsoft.com/office/powerpoint/2017/3/main" displayLoc="slide">
                         <p173:trackLst>
-                          <p173:track id="{E5A4F9A3-188E-4F16-881E-253F76E1D85D}" label="English (captions)" lang="en-US" r:embed="rId9"/>
+                          <p173:track id="{C4610B60-BE18-454A-A21D-19FD173668DF}" label="English (captions)" lang="en-US" r:embed="rId9"/>
                         </p173:trackLst>
                       </p173:tracksInfo>
                     </p:ext>
@@ -8332,7 +8332,7 @@
             <a:hlinkClick r:id="" action="ppaction://media"/>
             <a:extLst>
               <a:ext uri="{FF2B5EF4-FFF2-40B4-BE49-F238E27FC236}">
-                <a16:creationId xmlns:a16="http://schemas.microsoft.com/office/drawing/2014/main" id="{8431D132-77DC-5912-91F5-6D12F104C466}"/>
+                <a16:creationId xmlns:a16="http://schemas.microsoft.com/office/drawing/2014/main" id="{41442E65-D106-A27A-7D1E-500F4600D2FE}"/>
               </a:ext>
             </a:extLst>
           </p:cNvPr>
@@ -8348,7 +8348,7 @@
                     <p:ext uri="{3AFAAA56-56D3-431D-BCD4-E75A35582382}">
                       <p173:tracksInfo xmlns:p173="http://schemas.microsoft.com/office/powerpoint/2017/3/main" displayLoc="slide">
                         <p173:trackLst>
-                          <p173:track id="{36C6FBDC-1F29-4B09-8037-035A4DF8354B}" label="English (captions)" lang="en-US" r:embed="rId11"/>
+                          <p173:track id="{A14D8ED3-919B-40FD-844F-D807805FD6CE}" label="English (captions)" lang="en-US" r:embed="rId11"/>
                         </p173:trackLst>
                       </p173:tracksInfo>
                     </p:ext>
@@ -9315,7 +9315,7 @@
             <a:hlinkClick r:id="" action="ppaction://media"/>
             <a:extLst>
               <a:ext uri="{FF2B5EF4-FFF2-40B4-BE49-F238E27FC236}">
-                <a16:creationId xmlns:a16="http://schemas.microsoft.com/office/drawing/2014/main" id="{14ABED36-8839-61D4-A021-EC0519F3F15D}"/>
+                <a16:creationId xmlns:a16="http://schemas.microsoft.com/office/drawing/2014/main" id="{1EB6920F-43A8-ADA5-78DA-065B1214FF21}"/>
               </a:ext>
             </a:extLst>
           </p:cNvPr>
@@ -9331,7 +9331,7 @@
                     <p:ext uri="{3AFAAA56-56D3-431D-BCD4-E75A35582382}">
                       <p173:tracksInfo xmlns:p173="http://schemas.microsoft.com/office/powerpoint/2017/3/main" displayLoc="slide">
                         <p173:trackLst>
-                          <p173:track id="{116E2369-19A0-4D70-9312-3F7B9781F0E9}" label="English (captions)" lang="en-US" r:embed="rId9"/>
+                          <p173:track id="{0CFDD330-CDFA-41FB-A62A-8C7BF796FF84}" label="English (captions)" lang="en-US" r:embed="rId9"/>
                         </p173:trackLst>
                       </p173:tracksInfo>
                     </p:ext>
@@ -10450,7 +10450,7 @@
             <a:hlinkClick r:id="" action="ppaction://media"/>
             <a:extLst>
               <a:ext uri="{FF2B5EF4-FFF2-40B4-BE49-F238E27FC236}">
-                <a16:creationId xmlns:a16="http://schemas.microsoft.com/office/drawing/2014/main" id="{CED6C992-DB88-5D7A-366B-CFAE3630DDFA}"/>
+                <a16:creationId xmlns:a16="http://schemas.microsoft.com/office/drawing/2014/main" id="{5C5843BE-7076-E67F-3121-16A6DBDFD4DA}"/>
               </a:ext>
             </a:extLst>
           </p:cNvPr>
@@ -10466,7 +10466,7 @@
                     <p:ext uri="{3AFAAA56-56D3-431D-BCD4-E75A35582382}">
                       <p173:tracksInfo xmlns:p173="http://schemas.microsoft.com/office/powerpoint/2017/3/main" displayLoc="slide">
                         <p173:trackLst>
-                          <p173:track id="{088541CF-2576-4573-9081-DCA983111833}" label="English (captions)" lang="en-US" r:embed="rId10"/>
+                          <p173:track id="{6E21E005-D8E3-470B-A972-3E8F8BDB35BD}" label="English (captions)" lang="en-US" r:embed="rId10"/>
                         </p173:trackLst>
                       </p173:tracksInfo>
                     </p:ext>
@@ -12232,7 +12232,7 @@
             <a:hlinkClick r:id="" action="ppaction://media"/>
             <a:extLst>
               <a:ext uri="{FF2B5EF4-FFF2-40B4-BE49-F238E27FC236}">
-                <a16:creationId xmlns:a16="http://schemas.microsoft.com/office/drawing/2014/main" id="{406433DE-F2F3-BC45-5B25-1C8DE05D8165}"/>
+                <a16:creationId xmlns:a16="http://schemas.microsoft.com/office/drawing/2014/main" id="{C895844C-6FA7-0CDB-A7C5-5931404AA415}"/>
               </a:ext>
             </a:extLst>
           </p:cNvPr>
@@ -12248,7 +12248,7 @@
                     <p:ext uri="{3AFAAA56-56D3-431D-BCD4-E75A35582382}">
                       <p173:tracksInfo xmlns:p173="http://schemas.microsoft.com/office/powerpoint/2017/3/main" displayLoc="slide">
                         <p173:trackLst>
-                          <p173:track id="{B4D6AAFA-12B2-4FEC-A2D3-E830A0C41E00}" label="English (captions)" lang="en-US" r:embed="rId8"/>
+                          <p173:track id="{9F6F3C5E-6661-4A98-A0A0-63AF3CB64894}" label="English (captions)" lang="en-US" r:embed="rId8"/>
                         </p173:trackLst>
                       </p173:tracksInfo>
                     </p:ext>
@@ -13686,7 +13686,7 @@
             <a:hlinkClick r:id="" action="ppaction://media"/>
             <a:extLst>
               <a:ext uri="{FF2B5EF4-FFF2-40B4-BE49-F238E27FC236}">
-                <a16:creationId xmlns:a16="http://schemas.microsoft.com/office/drawing/2014/main" id="{8F5D92EA-EE00-0C12-5A5C-3C3306926144}"/>
+                <a16:creationId xmlns:a16="http://schemas.microsoft.com/office/drawing/2014/main" id="{00A900BA-E38B-D2A4-6BB8-50561F3276CE}"/>
               </a:ext>
             </a:extLst>
           </p:cNvPr>
@@ -13702,7 +13702,7 @@
                     <p:ext uri="{3AFAAA56-56D3-431D-BCD4-E75A35582382}">
                       <p173:tracksInfo xmlns:p173="http://schemas.microsoft.com/office/powerpoint/2017/3/main" displayLoc="slide">
                         <p173:trackLst>
-                          <p173:track id="{2F7565BB-8909-408F-AFAA-03D09526541E}" label="English (captions)" lang="en-US" r:embed="rId9"/>
+                          <p173:track id="{AE3B1060-6217-4B2F-8085-EA3CE1667ACE}" label="English (captions)" lang="en-US" r:embed="rId9"/>
                         </p173:trackLst>
                       </p173:tracksInfo>
                     </p:ext>
@@ -14961,7 +14961,7 @@
             <a:hlinkClick r:id="" action="ppaction://media"/>
             <a:extLst>
               <a:ext uri="{FF2B5EF4-FFF2-40B4-BE49-F238E27FC236}">
-                <a16:creationId xmlns:a16="http://schemas.microsoft.com/office/drawing/2014/main" id="{0B95A2CF-F5A0-9E48-BC54-94420BC0E748}"/>
+                <a16:creationId xmlns:a16="http://schemas.microsoft.com/office/drawing/2014/main" id="{CA8812E8-E5DD-3F1D-8735-B8C030F0EAAD}"/>
               </a:ext>
             </a:extLst>
           </p:cNvPr>
@@ -14977,7 +14977,7 @@
                     <p:ext uri="{3AFAAA56-56D3-431D-BCD4-E75A35582382}">
                       <p173:tracksInfo xmlns:p173="http://schemas.microsoft.com/office/powerpoint/2017/3/main" displayLoc="slide">
                         <p173:trackLst>
-                          <p173:track id="{43E3DE83-5DAE-42F0-8181-B761BFD8947E}" label="English (captions)" lang="en-US" r:embed="rId8"/>
+                          <p173:track id="{1F53D6FA-82C8-4D91-971E-59B8C751908B}" label="English (captions)" lang="en-US" r:embed="rId8"/>
                         </p173:trackLst>
                       </p173:tracksInfo>
                     </p:ext>
@@ -15944,7 +15944,7 @@
             <a:hlinkClick r:id="" action="ppaction://media"/>
             <a:extLst>
               <a:ext uri="{FF2B5EF4-FFF2-40B4-BE49-F238E27FC236}">
-                <a16:creationId xmlns:a16="http://schemas.microsoft.com/office/drawing/2014/main" id="{965F2E0E-9B9B-A841-3EC9-D1C3671699C8}"/>
+                <a16:creationId xmlns:a16="http://schemas.microsoft.com/office/drawing/2014/main" id="{009F2E23-3A25-71A1-B1B1-4261AFD109C0}"/>
               </a:ext>
             </a:extLst>
           </p:cNvPr>
@@ -15960,7 +15960,7 @@
                     <p:ext uri="{3AFAAA56-56D3-431D-BCD4-E75A35582382}">
                       <p173:tracksInfo xmlns:p173="http://schemas.microsoft.com/office/powerpoint/2017/3/main" displayLoc="slide">
                         <p173:trackLst>
-                          <p173:track id="{F4F291A4-849D-4ACC-AC26-E38B7F3C4B45}" label="English (captions)" lang="en-US" r:embed="rId9"/>
+                          <p173:track id="{EF1ED76B-606E-4EE8-B408-20892A3927CC}" label="English (captions)" lang="en-US" r:embed="rId9"/>
                         </p173:trackLst>
                       </p173:tracksInfo>
                     </p:ext>
@@ -17291,7 +17291,7 @@
             <a:hlinkClick r:id="" action="ppaction://media"/>
             <a:extLst>
               <a:ext uri="{FF2B5EF4-FFF2-40B4-BE49-F238E27FC236}">
-                <a16:creationId xmlns:a16="http://schemas.microsoft.com/office/drawing/2014/main" id="{579F2033-108D-51AB-2474-2A2DFBF76005}"/>
+                <a16:creationId xmlns:a16="http://schemas.microsoft.com/office/drawing/2014/main" id="{82F5D360-A928-EDC8-70B7-C1BCCC63B403}"/>
               </a:ext>
             </a:extLst>
           </p:cNvPr>
@@ -17307,7 +17307,7 @@
                     <p:ext uri="{3AFAAA56-56D3-431D-BCD4-E75A35582382}">
                       <p173:tracksInfo xmlns:p173="http://schemas.microsoft.com/office/powerpoint/2017/3/main" displayLoc="slide">
                         <p173:trackLst>
-                          <p173:track id="{E18CDA34-0F59-434C-8A1F-7DEDEB3A9B64}" label="English (captions)" lang="en-US" r:embed="rId9"/>
+                          <p173:track id="{559250BD-B5E8-4658-B9B6-6E9056F2767D}" label="English (captions)" lang="en-US" r:embed="rId9"/>
                         </p173:trackLst>
                       </p173:tracksInfo>
                     </p:ext>
@@ -18589,7 +18589,7 @@
                           <a:ea typeface="Calibri" pitchFamily="34" charset="-122"/>
                           <a:cs typeface="Calibri" pitchFamily="34" charset="-120"/>
                         </a:rPr>
-                        <a:t>9.1 lists no NIST or DISA benchmark; STIG still a readiness guide</a:t>
+                        <a:t>9.1 lists no NIST benchmark; map the vendor hardening guide to CM-6</a:t>
                       </a:r>
                       <a:endParaRPr lang="en-US" sz="1250" dirty="0">
                         <a:latin typeface="Calibri" charset="0"/>
@@ -19134,7 +19134,7 @@
             <a:hlinkClick r:id="" action="ppaction://media"/>
             <a:extLst>
               <a:ext uri="{FF2B5EF4-FFF2-40B4-BE49-F238E27FC236}">
-                <a16:creationId xmlns:a16="http://schemas.microsoft.com/office/drawing/2014/main" id="{1108A326-CD7E-AE67-3CA1-4561B70F5BE9}"/>
+                <a16:creationId xmlns:a16="http://schemas.microsoft.com/office/drawing/2014/main" id="{BEF30416-D963-AAF8-CBD4-8B53714732B1}"/>
               </a:ext>
             </a:extLst>
           </p:cNvPr>
@@ -19150,7 +19150,7 @@
                     <p:ext uri="{3AFAAA56-56D3-431D-BCD4-E75A35582382}">
                       <p173:tracksInfo xmlns:p173="http://schemas.microsoft.com/office/powerpoint/2017/3/main" displayLoc="slide">
                         <p173:trackLst>
-                          <p173:track id="{125C8EBB-6196-435B-A036-BFF3F8E3E637}" label="English (captions)" lang="en-US" r:embed="rId8"/>
+                          <p173:track id="{373498BA-18AD-4FDA-948C-A27089B3AAA8}" label="English (captions)" lang="en-US" r:embed="rId8"/>
                         </p173:trackLst>
                       </p173:tracksInfo>
                     </p:ext>
